--- a/content/docs/theory-analysis/envoy-architecture/images/images.pptx
+++ b/content/docs/theory-analysis/envoy-architecture/images/images.pptx
@@ -227,7 +227,7 @@
           <a:p>
             <a:fld id="{6CD5550B-26C4-49A9-A5BA-636EF7BE6CE9}" type="datetimeFigureOut">
               <a:rPr lang="ko-KR" altLang="en-US" smtClean="0"/>
-              <a:t>2026. 6. 21.</a:t>
+              <a:t>2026. 6. 22.</a:t>
             </a:fld>
             <a:endParaRPr lang="ko-KR" altLang="en-US"/>
           </a:p>
@@ -673,7 +673,7 @@
           <a:p>
             <a:fld id="{FB30EDBD-1C2D-4C1E-B459-B60219FAB484}" type="datetimeFigureOut">
               <a:rPr lang="ko-KR" altLang="en-US" smtClean="0"/>
-              <a:t>2026. 6. 21.</a:t>
+              <a:t>2026. 6. 22.</a:t>
             </a:fld>
             <a:endParaRPr lang="ko-KR" altLang="en-US"/>
           </a:p>
@@ -836,7 +836,7 @@
           <a:p>
             <a:fld id="{FB30EDBD-1C2D-4C1E-B459-B60219FAB484}" type="datetimeFigureOut">
               <a:rPr lang="ko-KR" altLang="en-US" smtClean="0"/>
-              <a:t>2026. 6. 21.</a:t>
+              <a:t>2026. 6. 22.</a:t>
             </a:fld>
             <a:endParaRPr lang="ko-KR" altLang="en-US"/>
           </a:p>
@@ -1009,7 +1009,7 @@
           <a:p>
             <a:fld id="{FB30EDBD-1C2D-4C1E-B459-B60219FAB484}" type="datetimeFigureOut">
               <a:rPr lang="ko-KR" altLang="en-US" smtClean="0"/>
-              <a:t>2026. 6. 21.</a:t>
+              <a:t>2026. 6. 22.</a:t>
             </a:fld>
             <a:endParaRPr lang="ko-KR" altLang="en-US"/>
           </a:p>
@@ -1172,7 +1172,7 @@
           <a:p>
             <a:fld id="{FB30EDBD-1C2D-4C1E-B459-B60219FAB484}" type="datetimeFigureOut">
               <a:rPr lang="ko-KR" altLang="en-US" smtClean="0"/>
-              <a:t>2026. 6. 21.</a:t>
+              <a:t>2026. 6. 22.</a:t>
             </a:fld>
             <a:endParaRPr lang="ko-KR" altLang="en-US"/>
           </a:p>
@@ -1412,7 +1412,7 @@
           <a:p>
             <a:fld id="{FB30EDBD-1C2D-4C1E-B459-B60219FAB484}" type="datetimeFigureOut">
               <a:rPr lang="ko-KR" altLang="en-US" smtClean="0"/>
-              <a:t>2026. 6. 21.</a:t>
+              <a:t>2026. 6. 22.</a:t>
             </a:fld>
             <a:endParaRPr lang="ko-KR" altLang="en-US"/>
           </a:p>
@@ -1692,7 +1692,7 @@
           <a:p>
             <a:fld id="{FB30EDBD-1C2D-4C1E-B459-B60219FAB484}" type="datetimeFigureOut">
               <a:rPr lang="ko-KR" altLang="en-US" smtClean="0"/>
-              <a:t>2026. 6. 21.</a:t>
+              <a:t>2026. 6. 22.</a:t>
             </a:fld>
             <a:endParaRPr lang="ko-KR" altLang="en-US"/>
           </a:p>
@@ -2106,7 +2106,7 @@
           <a:p>
             <a:fld id="{FB30EDBD-1C2D-4C1E-B459-B60219FAB484}" type="datetimeFigureOut">
               <a:rPr lang="ko-KR" altLang="en-US" smtClean="0"/>
-              <a:t>2026. 6. 21.</a:t>
+              <a:t>2026. 6. 22.</a:t>
             </a:fld>
             <a:endParaRPr lang="ko-KR" altLang="en-US"/>
           </a:p>
@@ -2218,7 +2218,7 @@
           <a:p>
             <a:fld id="{FB30EDBD-1C2D-4C1E-B459-B60219FAB484}" type="datetimeFigureOut">
               <a:rPr lang="ko-KR" altLang="en-US" smtClean="0"/>
-              <a:t>2026. 6. 21.</a:t>
+              <a:t>2026. 6. 22.</a:t>
             </a:fld>
             <a:endParaRPr lang="ko-KR" altLang="en-US"/>
           </a:p>
@@ -2308,7 +2308,7 @@
           <a:p>
             <a:fld id="{FB30EDBD-1C2D-4C1E-B459-B60219FAB484}" type="datetimeFigureOut">
               <a:rPr lang="ko-KR" altLang="en-US" smtClean="0"/>
-              <a:t>2026. 6. 21.</a:t>
+              <a:t>2026. 6. 22.</a:t>
             </a:fld>
             <a:endParaRPr lang="ko-KR" altLang="en-US"/>
           </a:p>
@@ -2578,7 +2578,7 @@
           <a:p>
             <a:fld id="{FB30EDBD-1C2D-4C1E-B459-B60219FAB484}" type="datetimeFigureOut">
               <a:rPr lang="ko-KR" altLang="en-US" smtClean="0"/>
-              <a:t>2026. 6. 21.</a:t>
+              <a:t>2026. 6. 22.</a:t>
             </a:fld>
             <a:endParaRPr lang="ko-KR" altLang="en-US"/>
           </a:p>
@@ -2825,7 +2825,7 @@
           <a:p>
             <a:fld id="{FB30EDBD-1C2D-4C1E-B459-B60219FAB484}" type="datetimeFigureOut">
               <a:rPr lang="ko-KR" altLang="en-US" smtClean="0"/>
-              <a:t>2026. 6. 21.</a:t>
+              <a:t>2026. 6. 22.</a:t>
             </a:fld>
             <a:endParaRPr lang="ko-KR" altLang="en-US"/>
           </a:p>
@@ -3031,7 +3031,7 @@
           <a:p>
             <a:fld id="{FB30EDBD-1C2D-4C1E-B459-B60219FAB484}" type="datetimeFigureOut">
               <a:rPr lang="ko-KR" altLang="en-US" smtClean="0"/>
-              <a:t>2026. 6. 21.</a:t>
+              <a:t>2026. 6. 22.</a:t>
             </a:fld>
             <a:endParaRPr lang="ko-KR" altLang="en-US"/>
           </a:p>
@@ -4573,8 +4573,8 @@
         </p:nvSpPr>
         <p:spPr>
           <a:xfrm>
-            <a:off x="1843573" y="3679811"/>
-            <a:ext cx="4964487" cy="802430"/>
+            <a:off x="2958584" y="3679811"/>
+            <a:ext cx="3849476" cy="802430"/>
           </a:xfrm>
           <a:prstGeom prst="roundRect">
             <a:avLst>

--- a/content/docs/theory-analysis/envoy-architecture/images/images.pptx
+++ b/content/docs/theory-analysis/envoy-architecture/images/images.pptx
@@ -4613,7 +4613,7 @@
                   <a:schemeClr val="tx1"/>
                 </a:solidFill>
               </a:rPr>
-              <a:t>Per Connection State</a:t>
+              <a:t>Per connection/stream state</a:t>
             </a:r>
             <a:endParaRPr kumimoji="1" lang="ko-KR" altLang="en-US" sz="900">
               <a:solidFill>
